--- a/ch09/Django4-ch09.pptx
+++ b/ch09/Django4-ch09.pptx
@@ -2204,7 +2204,7 @@
             <a:fld id="{FBFE2433-649F-42E5-AECB-94990831C40A}" type="datetimeFigureOut">
               <a:rPr lang="zh-TW" altLang="en-US" smtClean="0"/>
               <a:pPr/>
-              <a:t>2025/12/8</a:t>
+              <a:t>2026/6/11</a:t>
             </a:fld>
             <a:endParaRPr lang="zh-TW" altLang="en-US"/>
           </a:p>
@@ -4569,7 +4569,7 @@
             <a:fld id="{DF19C816-D38B-498E-804E-00D02760FC7A}" type="datetime1">
               <a:rPr lang="zh-TW" altLang="en-US" smtClean="0"/>
               <a:pPr/>
-              <a:t>2025/12/8</a:t>
+              <a:t>2026/6/11</a:t>
             </a:fld>
             <a:endParaRPr lang="zh-TW" altLang="en-US"/>
           </a:p>
@@ -4959,7 +4959,7 @@
             <a:fld id="{BFF116A9-7278-4674-BCA0-66C5F066EB15}" type="datetime1">
               <a:rPr lang="zh-TW" altLang="en-US" smtClean="0"/>
               <a:pPr/>
-              <a:t>2025/12/8</a:t>
+              <a:t>2026/6/11</a:t>
             </a:fld>
             <a:endParaRPr lang="zh-TW" altLang="en-US"/>
           </a:p>
@@ -5489,7 +5489,7 @@
             <a:fld id="{97D0AF00-ACBD-4185-8358-D82955DAF0D3}" type="datetime1">
               <a:rPr lang="zh-TW" altLang="en-US" smtClean="0"/>
               <a:pPr/>
-              <a:t>2025/12/8</a:t>
+              <a:t>2026/6/11</a:t>
             </a:fld>
             <a:endParaRPr lang="zh-TW" altLang="en-US"/>
           </a:p>
@@ -5618,7 +5618,7 @@
             <a:fld id="{E16BAABA-C288-41C0-9D8E-87773CE9488B}" type="datetime1">
               <a:rPr lang="zh-TW" altLang="en-US" smtClean="0"/>
               <a:pPr/>
-              <a:t>2025/12/8</a:t>
+              <a:t>2026/6/11</a:t>
             </a:fld>
             <a:endParaRPr lang="zh-TW" altLang="en-US"/>
           </a:p>
@@ -6158,7 +6158,7 @@
             <a:fld id="{E6F79EFE-5102-4BAD-A377-702F02C2814E}" type="datetime1">
               <a:rPr lang="zh-TW" altLang="en-US" smtClean="0"/>
               <a:pPr/>
-              <a:t>2025/12/8</a:t>
+              <a:t>2026/6/11</a:t>
             </a:fld>
             <a:endParaRPr lang="zh-TW" altLang="en-US"/>
           </a:p>
@@ -6450,7 +6450,7 @@
             <a:fld id="{240F5BD8-68CC-49A6-B769-229D3FACB86C}" type="datetime1">
               <a:rPr lang="zh-TW" altLang="en-US" smtClean="0"/>
               <a:pPr/>
-              <a:t>2025/12/8</a:t>
+              <a:t>2026/6/11</a:t>
             </a:fld>
             <a:endParaRPr lang="zh-TW" altLang="en-US"/>
           </a:p>
@@ -7106,7 +7106,7 @@
             <a:fld id="{C95C3C99-9A5D-4B12-8519-BF3493FEA3BD}" type="datetime1">
               <a:rPr lang="zh-TW" altLang="en-US" smtClean="0"/>
               <a:pPr/>
-              <a:t>2025/12/8</a:t>
+              <a:t>2026/6/11</a:t>
             </a:fld>
             <a:endParaRPr lang="zh-TW" altLang="en-US"/>
           </a:p>
@@ -7544,7 +7544,7 @@
             <a:fld id="{C0C1B973-9C4C-43B9-BBC9-7D038B5E66BB}" type="datetime1">
               <a:rPr lang="zh-TW" altLang="en-US" smtClean="0"/>
               <a:pPr/>
-              <a:t>2025/12/8</a:t>
+              <a:t>2026/6/11</a:t>
             </a:fld>
             <a:endParaRPr lang="zh-TW" altLang="en-US"/>
           </a:p>
@@ -7859,7 +7859,7 @@
             <a:fld id="{E3A2E384-56FB-46D9-B267-C20E836A8212}" type="datetime1">
               <a:rPr lang="zh-TW" altLang="en-US" smtClean="0"/>
               <a:pPr/>
-              <a:t>2025/12/8</a:t>
+              <a:t>2026/6/11</a:t>
             </a:fld>
             <a:endParaRPr lang="zh-TW" altLang="en-US"/>
           </a:p>
@@ -8589,7 +8589,7 @@
             <a:fld id="{33A25C06-3635-48B4-9326-561BB1229EEB}" type="datetime1">
               <a:rPr lang="zh-TW" altLang="en-US" smtClean="0"/>
               <a:pPr/>
-              <a:t>2025/12/8</a:t>
+              <a:t>2026/6/11</a:t>
             </a:fld>
             <a:endParaRPr lang="zh-TW" altLang="en-US"/>
           </a:p>
@@ -9255,7 +9255,7 @@
             <a:fld id="{BA9F43BE-0941-4E88-B57D-D38DECBCB997}" type="datetime1">
               <a:rPr lang="zh-TW" altLang="en-US" smtClean="0"/>
               <a:pPr/>
-              <a:t>2025/12/8</a:t>
+              <a:t>2026/6/11</a:t>
             </a:fld>
             <a:endParaRPr lang="zh-TW" altLang="en-US"/>
           </a:p>
@@ -9532,7 +9532,7 @@
             <a:fld id="{73E7C058-3467-44CD-AC53-31F205DF3CA0}" type="datetime1">
               <a:rPr lang="zh-TW" altLang="en-US" smtClean="0"/>
               <a:pPr/>
-              <a:t>2025/12/8</a:t>
+              <a:t>2026/6/11</a:t>
             </a:fld>
             <a:endParaRPr lang="zh-TW" altLang="en-US"/>
           </a:p>
@@ -20611,8 +20611,8 @@
         </p:nvSpPr>
         <p:spPr>
           <a:xfrm>
-            <a:off x="1259632" y="3401887"/>
-            <a:ext cx="4248472" cy="432048"/>
+            <a:off x="1619672" y="3501008"/>
+            <a:ext cx="5184576" cy="432048"/>
           </a:xfrm>
           <a:prstGeom prst="rect">
             <a:avLst/>
@@ -29707,6 +29707,18 @@
               <a:rPr lang="zh-TW" altLang="zh-TW" dirty="0"/>
               <a:t>網站</a:t>
             </a:r>
+            <a:r>
+              <a:rPr lang="en-US" altLang="zh-TW" dirty="0"/>
+              <a:t>(</a:t>
+            </a:r>
+            <a:r>
+              <a:rPr lang="zh-TW" altLang="en-US" dirty="0"/>
+              <a:t>總共改四個檔案</a:t>
+            </a:r>
+            <a:r>
+              <a:rPr lang="en-US" altLang="zh-TW" dirty="0"/>
+              <a:t>)</a:t>
+            </a:r>
             <a:endParaRPr lang="zh-TW" altLang="en-US" dirty="0"/>
           </a:p>
         </p:txBody>
@@ -29795,7 +29807,86 @@
               <a:t>dj4ch08\dj4ch08\</a:t>
             </a:r>
             <a:r>
+              <a:rPr lang="en-US" altLang="zh-TW" sz="2400" b="1" kern="100" dirty="0" err="1">
+                <a:solidFill>
+                  <a:srgbClr val="FF0000"/>
+                </a:solidFill>
+                <a:effectLst/>
+                <a:latin typeface="Courier New" panose="02070309020205020404" pitchFamily="49" charset="0"/>
+                <a:ea typeface="標楷體" panose="03000509000000000000" pitchFamily="65" charset="-120"/>
+              </a:rPr>
+              <a:t>asgi.py</a:t>
+            </a:r>
+            <a:r>
               <a:rPr lang="en-US" altLang="zh-TW" sz="1800" kern="100" dirty="0" err="1">
+                <a:effectLst/>
+                <a:latin typeface="Courier New" panose="02070309020205020404" pitchFamily="49" charset="0"/>
+                <a:ea typeface="標楷體" panose="03000509000000000000" pitchFamily="65" charset="-120"/>
+              </a:rPr>
+              <a:t>:ASGI</a:t>
+            </a:r>
+            <a:r>
+              <a:rPr lang="en-US" altLang="zh-TW" sz="1800" kern="100" dirty="0">
+                <a:effectLst/>
+                <a:latin typeface="Courier New" panose="02070309020205020404" pitchFamily="49" charset="0"/>
+                <a:ea typeface="標楷體" panose="03000509000000000000" pitchFamily="65" charset="-120"/>
+              </a:rPr>
+              <a:t> config for dj4ch08 project.</a:t>
+            </a:r>
+            <a:endParaRPr lang="zh-TW" altLang="zh-TW" sz="1800" kern="100" dirty="0">
+              <a:effectLst/>
+              <a:latin typeface="Courier New" panose="02070309020205020404" pitchFamily="49" charset="0"/>
+              <a:ea typeface="標楷體" panose="03000509000000000000" pitchFamily="65" charset="-120"/>
+            </a:endParaRPr>
+          </a:p>
+          <a:p>
+            <a:pPr marL="0" indent="0">
+              <a:buNone/>
+            </a:pPr>
+            <a:r>
+              <a:rPr lang="en-US" altLang="zh-TW" sz="1800" kern="100" dirty="0">
+                <a:effectLst/>
+                <a:latin typeface="Courier New" panose="02070309020205020404" pitchFamily="49" charset="0"/>
+                <a:ea typeface="標楷體" panose="03000509000000000000" pitchFamily="65" charset="-120"/>
+              </a:rPr>
+              <a:t>dj4ch08\dj4ch08\</a:t>
+            </a:r>
+            <a:r>
+              <a:rPr lang="en-US" altLang="zh-TW" sz="1800" kern="100" dirty="0" err="1">
+                <a:effectLst/>
+                <a:latin typeface="Courier New" panose="02070309020205020404" pitchFamily="49" charset="0"/>
+                <a:ea typeface="標楷體" panose="03000509000000000000" pitchFamily="65" charset="-120"/>
+              </a:rPr>
+              <a:t>asgi.py:os.environ.setdefault</a:t>
+            </a:r>
+            <a:r>
+              <a:rPr lang="en-US" altLang="zh-TW" sz="1800" kern="100" dirty="0">
+                <a:effectLst/>
+                <a:latin typeface="Courier New" panose="02070309020205020404" pitchFamily="49" charset="0"/>
+                <a:ea typeface="標楷體" panose="03000509000000000000" pitchFamily="65" charset="-120"/>
+              </a:rPr>
+              <a:t>('DJANGO_SETTINGS_MODULE', 'dj4ch08.settings')</a:t>
+            </a:r>
+            <a:endParaRPr lang="zh-TW" altLang="zh-TW" sz="1800" kern="100" dirty="0">
+              <a:effectLst/>
+              <a:latin typeface="Courier New" panose="02070309020205020404" pitchFamily="49" charset="0"/>
+              <a:ea typeface="標楷體" panose="03000509000000000000" pitchFamily="65" charset="-120"/>
+            </a:endParaRPr>
+          </a:p>
+          <a:p>
+            <a:pPr marL="0" indent="0">
+              <a:buNone/>
+            </a:pPr>
+            <a:r>
+              <a:rPr lang="en-US" altLang="zh-TW" sz="1800" kern="100" dirty="0">
+                <a:effectLst/>
+                <a:latin typeface="Courier New" panose="02070309020205020404" pitchFamily="49" charset="0"/>
+                <a:ea typeface="標楷體" panose="03000509000000000000" pitchFamily="65" charset="-120"/>
+              </a:rPr>
+              <a:t>dj4ch08\dj4ch08\</a:t>
+            </a:r>
+            <a:r>
+              <a:rPr lang="en-US" altLang="zh-TW" sz="2100" b="1" kern="100" dirty="0" err="1">
                 <a:solidFill>
                   <a:srgbClr val="FF0000"/>
                 </a:solidFill>
@@ -29803,7 +29894,7 @@
                 <a:latin typeface="Courier New" panose="02070309020205020404" pitchFamily="49" charset="0"/>
                 <a:ea typeface="標楷體" panose="03000509000000000000" pitchFamily="65" charset="-120"/>
               </a:rPr>
-              <a:t>asgi.py</a:t>
+              <a:t>settings.py</a:t>
             </a:r>
             <a:r>
               <a:rPr lang="en-US" altLang="zh-TW" sz="1800" kern="100" dirty="0" err="1">
@@ -29811,7 +29902,120 @@
                 <a:latin typeface="Courier New" panose="02070309020205020404" pitchFamily="49" charset="0"/>
                 <a:ea typeface="標楷體" panose="03000509000000000000" pitchFamily="65" charset="-120"/>
               </a:rPr>
-              <a:t>:ASGI</a:t>
+              <a:t>:Django</a:t>
+            </a:r>
+            <a:r>
+              <a:rPr lang="en-US" altLang="zh-TW" sz="1800" kern="100" dirty="0">
+                <a:effectLst/>
+                <a:latin typeface="Courier New" panose="02070309020205020404" pitchFamily="49" charset="0"/>
+                <a:ea typeface="標楷體" panose="03000509000000000000" pitchFamily="65" charset="-120"/>
+              </a:rPr>
+              <a:t> settings for dj4ch08 project.</a:t>
+            </a:r>
+            <a:endParaRPr lang="zh-TW" altLang="zh-TW" sz="1800" kern="100" dirty="0">
+              <a:effectLst/>
+              <a:latin typeface="Courier New" panose="02070309020205020404" pitchFamily="49" charset="0"/>
+              <a:ea typeface="標楷體" panose="03000509000000000000" pitchFamily="65" charset="-120"/>
+            </a:endParaRPr>
+          </a:p>
+          <a:p>
+            <a:pPr marL="0" indent="0">
+              <a:buNone/>
+            </a:pPr>
+            <a:r>
+              <a:rPr lang="en-US" altLang="zh-TW" sz="1800" kern="100" dirty="0">
+                <a:effectLst/>
+                <a:latin typeface="Courier New" panose="02070309020205020404" pitchFamily="49" charset="0"/>
+                <a:ea typeface="標楷體" panose="03000509000000000000" pitchFamily="65" charset="-120"/>
+              </a:rPr>
+              <a:t>dj4ch08\dj4ch08\</a:t>
+            </a:r>
+            <a:r>
+              <a:rPr lang="en-US" altLang="zh-TW" sz="1800" kern="100" dirty="0" err="1">
+                <a:effectLst/>
+                <a:latin typeface="Courier New" panose="02070309020205020404" pitchFamily="49" charset="0"/>
+                <a:ea typeface="標楷體" panose="03000509000000000000" pitchFamily="65" charset="-120"/>
+              </a:rPr>
+              <a:t>settings.py:ROOT_URLCONF</a:t>
+            </a:r>
+            <a:r>
+              <a:rPr lang="en-US" altLang="zh-TW" sz="1800" kern="100" dirty="0">
+                <a:effectLst/>
+                <a:latin typeface="Courier New" panose="02070309020205020404" pitchFamily="49" charset="0"/>
+                <a:ea typeface="標楷體" panose="03000509000000000000" pitchFamily="65" charset="-120"/>
+              </a:rPr>
+              <a:t> = 'dj4ch08.urls'</a:t>
+            </a:r>
+            <a:endParaRPr lang="zh-TW" altLang="zh-TW" sz="1800" kern="100" dirty="0">
+              <a:effectLst/>
+              <a:latin typeface="Courier New" panose="02070309020205020404" pitchFamily="49" charset="0"/>
+              <a:ea typeface="標楷體" panose="03000509000000000000" pitchFamily="65" charset="-120"/>
+            </a:endParaRPr>
+          </a:p>
+          <a:p>
+            <a:pPr marL="0" indent="0">
+              <a:buNone/>
+            </a:pPr>
+            <a:r>
+              <a:rPr lang="en-US" altLang="zh-TW" sz="1800" kern="100" dirty="0">
+                <a:effectLst/>
+                <a:latin typeface="Courier New" panose="02070309020205020404" pitchFamily="49" charset="0"/>
+                <a:ea typeface="標楷體" panose="03000509000000000000" pitchFamily="65" charset="-120"/>
+              </a:rPr>
+              <a:t>dj4ch08\dj4ch08\</a:t>
+            </a:r>
+            <a:r>
+              <a:rPr lang="en-US" altLang="zh-TW" sz="1800" kern="100" dirty="0" err="1">
+                <a:effectLst/>
+                <a:latin typeface="Courier New" panose="02070309020205020404" pitchFamily="49" charset="0"/>
+                <a:ea typeface="標楷體" panose="03000509000000000000" pitchFamily="65" charset="-120"/>
+              </a:rPr>
+              <a:t>settings.py:WSGI_APPLICATION</a:t>
+            </a:r>
+            <a:r>
+              <a:rPr lang="en-US" altLang="zh-TW" sz="1800" kern="100" dirty="0">
+                <a:effectLst/>
+                <a:latin typeface="Courier New" panose="02070309020205020404" pitchFamily="49" charset="0"/>
+                <a:ea typeface="標楷體" panose="03000509000000000000" pitchFamily="65" charset="-120"/>
+              </a:rPr>
+              <a:t> = 'dj4ch08.wsgi.application'</a:t>
+            </a:r>
+            <a:endParaRPr lang="zh-TW" altLang="zh-TW" sz="1800" kern="100" dirty="0">
+              <a:effectLst/>
+              <a:latin typeface="Courier New" panose="02070309020205020404" pitchFamily="49" charset="0"/>
+              <a:ea typeface="標楷體" panose="03000509000000000000" pitchFamily="65" charset="-120"/>
+            </a:endParaRPr>
+          </a:p>
+          <a:p>
+            <a:pPr marL="0" indent="0">
+              <a:buNone/>
+            </a:pPr>
+            <a:r>
+              <a:rPr lang="en-US" altLang="zh-TW" sz="1800" kern="100" dirty="0">
+                <a:effectLst/>
+                <a:latin typeface="Courier New" panose="02070309020205020404" pitchFamily="49" charset="0"/>
+                <a:ea typeface="標楷體" panose="03000509000000000000" pitchFamily="65" charset="-120"/>
+              </a:rPr>
+              <a:t>dj4ch08\dj4ch08\</a:t>
+            </a:r>
+            <a:r>
+              <a:rPr lang="en-US" altLang="zh-TW" sz="2100" b="1" kern="100" dirty="0" err="1">
+                <a:solidFill>
+                  <a:srgbClr val="FF0000"/>
+                </a:solidFill>
+                <a:effectLst/>
+                <a:latin typeface="Courier New" panose="02070309020205020404" pitchFamily="49" charset="0"/>
+                <a:ea typeface="標楷體" panose="03000509000000000000" pitchFamily="65" charset="-120"/>
+              </a:rPr>
+              <a:t>wsgi.py</a:t>
+            </a:r>
+            <a:r>
+              <a:rPr lang="en-US" altLang="zh-TW" sz="1800" kern="100" dirty="0" err="1">
+                <a:effectLst/>
+                <a:latin typeface="Courier New" panose="02070309020205020404" pitchFamily="49" charset="0"/>
+                <a:ea typeface="標楷體" panose="03000509000000000000" pitchFamily="65" charset="-120"/>
+              </a:rPr>
+              <a:t>:WSGI</a:t>
             </a:r>
             <a:r>
               <a:rPr lang="en-US" altLang="zh-TW" sz="1800" kern="100" dirty="0">
@@ -29845,7 +30049,7 @@
                 <a:latin typeface="Courier New" panose="02070309020205020404" pitchFamily="49" charset="0"/>
                 <a:ea typeface="標楷體" panose="03000509000000000000" pitchFamily="65" charset="-120"/>
               </a:rPr>
-              <a:t>asgi.py:os.environ.setdefault</a:t>
+              <a:t>wsgi.py:os.environ.setdefault</a:t>
             </a:r>
             <a:r>
               <a:rPr lang="en-US" altLang="zh-TW" sz="1800" kern="100" dirty="0">
@@ -29871,202 +30075,10 @@
                 <a:latin typeface="Courier New" panose="02070309020205020404" pitchFamily="49" charset="0"/>
                 <a:ea typeface="標楷體" panose="03000509000000000000" pitchFamily="65" charset="-120"/>
               </a:rPr>
-              <a:t>dj4ch08\dj4ch08\</a:t>
-            </a:r>
-            <a:r>
-              <a:rPr lang="en-US" altLang="zh-TW" sz="1800" kern="100" dirty="0" err="1">
-                <a:solidFill>
-                  <a:srgbClr val="FF0000"/>
-                </a:solidFill>
-                <a:effectLst/>
-                <a:latin typeface="Courier New" panose="02070309020205020404" pitchFamily="49" charset="0"/>
-                <a:ea typeface="標楷體" panose="03000509000000000000" pitchFamily="65" charset="-120"/>
-              </a:rPr>
-              <a:t>settings.py</a:t>
-            </a:r>
-            <a:r>
-              <a:rPr lang="en-US" altLang="zh-TW" sz="1800" kern="100" dirty="0" err="1">
-                <a:effectLst/>
-                <a:latin typeface="Courier New" panose="02070309020205020404" pitchFamily="49" charset="0"/>
-                <a:ea typeface="標楷體" panose="03000509000000000000" pitchFamily="65" charset="-120"/>
-              </a:rPr>
-              <a:t>:Django</a:t>
-            </a:r>
-            <a:r>
-              <a:rPr lang="en-US" altLang="zh-TW" sz="1800" kern="100" dirty="0">
-                <a:effectLst/>
-                <a:latin typeface="Courier New" panose="02070309020205020404" pitchFamily="49" charset="0"/>
-                <a:ea typeface="標楷體" panose="03000509000000000000" pitchFamily="65" charset="-120"/>
-              </a:rPr>
-              <a:t> settings for dj4ch08 project.</a:t>
-            </a:r>
-            <a:endParaRPr lang="zh-TW" altLang="zh-TW" sz="1800" kern="100" dirty="0">
-              <a:effectLst/>
-              <a:latin typeface="Courier New" panose="02070309020205020404" pitchFamily="49" charset="0"/>
-              <a:ea typeface="標楷體" panose="03000509000000000000" pitchFamily="65" charset="-120"/>
-            </a:endParaRPr>
-          </a:p>
-          <a:p>
-            <a:pPr marL="0" indent="0">
-              <a:buNone/>
-            </a:pPr>
-            <a:r>
-              <a:rPr lang="en-US" altLang="zh-TW" sz="1800" kern="100" dirty="0">
-                <a:effectLst/>
-                <a:latin typeface="Courier New" panose="02070309020205020404" pitchFamily="49" charset="0"/>
-                <a:ea typeface="標楷體" panose="03000509000000000000" pitchFamily="65" charset="-120"/>
-              </a:rPr>
-              <a:t>dj4ch08\dj4ch08\</a:t>
-            </a:r>
-            <a:r>
-              <a:rPr lang="en-US" altLang="zh-TW" sz="1800" kern="100" dirty="0" err="1">
-                <a:effectLst/>
-                <a:latin typeface="Courier New" panose="02070309020205020404" pitchFamily="49" charset="0"/>
-                <a:ea typeface="標楷體" panose="03000509000000000000" pitchFamily="65" charset="-120"/>
-              </a:rPr>
-              <a:t>settings.py:ROOT_URLCONF</a:t>
-            </a:r>
-            <a:r>
-              <a:rPr lang="en-US" altLang="zh-TW" sz="1800" kern="100" dirty="0">
-                <a:effectLst/>
-                <a:latin typeface="Courier New" panose="02070309020205020404" pitchFamily="49" charset="0"/>
-                <a:ea typeface="標楷體" panose="03000509000000000000" pitchFamily="65" charset="-120"/>
-              </a:rPr>
-              <a:t> = 'dj4ch08.urls'</a:t>
-            </a:r>
-            <a:endParaRPr lang="zh-TW" altLang="zh-TW" sz="1800" kern="100" dirty="0">
-              <a:effectLst/>
-              <a:latin typeface="Courier New" panose="02070309020205020404" pitchFamily="49" charset="0"/>
-              <a:ea typeface="標楷體" panose="03000509000000000000" pitchFamily="65" charset="-120"/>
-            </a:endParaRPr>
-          </a:p>
-          <a:p>
-            <a:pPr marL="0" indent="0">
-              <a:buNone/>
-            </a:pPr>
-            <a:r>
-              <a:rPr lang="en-US" altLang="zh-TW" sz="1800" kern="100" dirty="0">
-                <a:effectLst/>
-                <a:latin typeface="Courier New" panose="02070309020205020404" pitchFamily="49" charset="0"/>
-                <a:ea typeface="標楷體" panose="03000509000000000000" pitchFamily="65" charset="-120"/>
-              </a:rPr>
-              <a:t>dj4ch08\dj4ch08\</a:t>
-            </a:r>
-            <a:r>
-              <a:rPr lang="en-US" altLang="zh-TW" sz="1800" kern="100" dirty="0" err="1">
-                <a:effectLst/>
-                <a:latin typeface="Courier New" panose="02070309020205020404" pitchFamily="49" charset="0"/>
-                <a:ea typeface="標楷體" panose="03000509000000000000" pitchFamily="65" charset="-120"/>
-              </a:rPr>
-              <a:t>settings.py:WSGI_APPLICATION</a:t>
-            </a:r>
-            <a:r>
-              <a:rPr lang="en-US" altLang="zh-TW" sz="1800" kern="100" dirty="0">
-                <a:effectLst/>
-                <a:latin typeface="Courier New" panose="02070309020205020404" pitchFamily="49" charset="0"/>
-                <a:ea typeface="標楷體" panose="03000509000000000000" pitchFamily="65" charset="-120"/>
-              </a:rPr>
-              <a:t> = 'dj4ch08.wsgi.application'</a:t>
-            </a:r>
-            <a:endParaRPr lang="zh-TW" altLang="zh-TW" sz="1800" kern="100" dirty="0">
-              <a:effectLst/>
-              <a:latin typeface="Courier New" panose="02070309020205020404" pitchFamily="49" charset="0"/>
-              <a:ea typeface="標楷體" panose="03000509000000000000" pitchFamily="65" charset="-120"/>
-            </a:endParaRPr>
-          </a:p>
-          <a:p>
-            <a:pPr marL="0" indent="0">
-              <a:buNone/>
-            </a:pPr>
-            <a:r>
-              <a:rPr lang="en-US" altLang="zh-TW" sz="1800" kern="100" dirty="0">
-                <a:effectLst/>
-                <a:latin typeface="Courier New" panose="02070309020205020404" pitchFamily="49" charset="0"/>
-                <a:ea typeface="標楷體" panose="03000509000000000000" pitchFamily="65" charset="-120"/>
-              </a:rPr>
-              <a:t>dj4ch08\dj4ch08\</a:t>
-            </a:r>
-            <a:r>
-              <a:rPr lang="en-US" altLang="zh-TW" sz="1800" kern="100" dirty="0" err="1">
-                <a:solidFill>
-                  <a:srgbClr val="FF0000"/>
-                </a:solidFill>
-                <a:effectLst/>
-                <a:latin typeface="Courier New" panose="02070309020205020404" pitchFamily="49" charset="0"/>
-                <a:ea typeface="標楷體" panose="03000509000000000000" pitchFamily="65" charset="-120"/>
-              </a:rPr>
-              <a:t>wsgi.py</a:t>
-            </a:r>
-            <a:r>
-              <a:rPr lang="en-US" altLang="zh-TW" sz="1800" kern="100" dirty="0" err="1">
-                <a:effectLst/>
-                <a:latin typeface="Courier New" panose="02070309020205020404" pitchFamily="49" charset="0"/>
-                <a:ea typeface="標楷體" panose="03000509000000000000" pitchFamily="65" charset="-120"/>
-              </a:rPr>
-              <a:t>:WSGI</a:t>
-            </a:r>
-            <a:r>
-              <a:rPr lang="en-US" altLang="zh-TW" sz="1800" kern="100" dirty="0">
-                <a:effectLst/>
-                <a:latin typeface="Courier New" panose="02070309020205020404" pitchFamily="49" charset="0"/>
-                <a:ea typeface="標楷體" panose="03000509000000000000" pitchFamily="65" charset="-120"/>
-              </a:rPr>
-              <a:t> config for dj4ch08 project.</a:t>
-            </a:r>
-            <a:endParaRPr lang="zh-TW" altLang="zh-TW" sz="1800" kern="100" dirty="0">
-              <a:effectLst/>
-              <a:latin typeface="Courier New" panose="02070309020205020404" pitchFamily="49" charset="0"/>
-              <a:ea typeface="標楷體" panose="03000509000000000000" pitchFamily="65" charset="-120"/>
-            </a:endParaRPr>
-          </a:p>
-          <a:p>
-            <a:pPr marL="0" indent="0">
-              <a:buNone/>
-            </a:pPr>
-            <a:r>
-              <a:rPr lang="en-US" altLang="zh-TW" sz="1800" kern="100" dirty="0">
-                <a:effectLst/>
-                <a:latin typeface="Courier New" panose="02070309020205020404" pitchFamily="49" charset="0"/>
-                <a:ea typeface="標楷體" panose="03000509000000000000" pitchFamily="65" charset="-120"/>
-              </a:rPr>
-              <a:t>dj4ch08\dj4ch08\</a:t>
-            </a:r>
-            <a:r>
-              <a:rPr lang="en-US" altLang="zh-TW" sz="1800" kern="100" dirty="0" err="1">
-                <a:effectLst/>
-                <a:latin typeface="Courier New" panose="02070309020205020404" pitchFamily="49" charset="0"/>
-                <a:ea typeface="標楷體" panose="03000509000000000000" pitchFamily="65" charset="-120"/>
-              </a:rPr>
-              <a:t>wsgi.py:os.environ.setdefault</a:t>
-            </a:r>
-            <a:r>
-              <a:rPr lang="en-US" altLang="zh-TW" sz="1800" kern="100" dirty="0">
-                <a:effectLst/>
-                <a:latin typeface="Courier New" panose="02070309020205020404" pitchFamily="49" charset="0"/>
-                <a:ea typeface="標楷體" panose="03000509000000000000" pitchFamily="65" charset="-120"/>
-              </a:rPr>
-              <a:t>('DJANGO_SETTINGS_MODULE', 'dj4ch08.settings')</a:t>
-            </a:r>
-            <a:endParaRPr lang="zh-TW" altLang="zh-TW" sz="1800" kern="100" dirty="0">
-              <a:effectLst/>
-              <a:latin typeface="Courier New" panose="02070309020205020404" pitchFamily="49" charset="0"/>
-              <a:ea typeface="標楷體" panose="03000509000000000000" pitchFamily="65" charset="-120"/>
-            </a:endParaRPr>
-          </a:p>
-          <a:p>
-            <a:pPr marL="0" indent="0">
-              <a:buNone/>
-            </a:pPr>
-            <a:r>
-              <a:rPr lang="en-US" altLang="zh-TW" sz="1800" kern="100" dirty="0">
-                <a:effectLst/>
-                <a:latin typeface="Courier New" panose="02070309020205020404" pitchFamily="49" charset="0"/>
-                <a:ea typeface="標楷體" panose="03000509000000000000" pitchFamily="65" charset="-120"/>
-              </a:rPr>
               <a:t>dj4ch08\</a:t>
             </a:r>
             <a:r>
-              <a:rPr lang="en-US" altLang="zh-TW" sz="1800" kern="100" dirty="0">
+              <a:rPr lang="en-US" altLang="zh-TW" sz="2100" b="1" kern="100" dirty="0">
                 <a:solidFill>
                   <a:srgbClr val="FF0000"/>
                 </a:solidFill>
@@ -44178,7 +44190,7 @@
               <a:t> </a:t>
             </a:r>
             <a:r>
-              <a:rPr lang="en-US" altLang="zh-TW" sz="1000" b="1" kern="100" dirty="0">
+              <a:rPr lang="en-US" altLang="zh-TW" sz="2400" b="1" kern="100" dirty="0">
                 <a:solidFill>
                   <a:srgbClr val="FF0000"/>
                 </a:solidFill>
@@ -44188,7 +44200,7 @@
               </a:rPr>
               <a:t>&lt;div class="col-md-6"&gt;</a:t>
             </a:r>
-            <a:endParaRPr lang="zh-TW" altLang="zh-TW" sz="1000" kern="100" dirty="0">
+            <a:endParaRPr lang="zh-TW" altLang="zh-TW" sz="1000" b="1" kern="100" dirty="0">
               <a:solidFill>
                 <a:srgbClr val="FF0000"/>
               </a:solidFill>
@@ -44902,7 +44914,7 @@
               <a:t>        </a:t>
             </a:r>
             <a:r>
-              <a:rPr lang="en-US" altLang="zh-TW" sz="1000" b="1" kern="100" dirty="0">
+              <a:rPr lang="en-US" altLang="zh-TW" sz="1700" b="1" kern="100" dirty="0">
                 <a:solidFill>
                   <a:srgbClr val="FF0000"/>
                 </a:solidFill>

--- a/ch09/Django4-ch09.pptx
+++ b/ch09/Django4-ch09.pptx
@@ -2204,7 +2204,7 @@
             <a:fld id="{FBFE2433-649F-42E5-AECB-94990831C40A}" type="datetimeFigureOut">
               <a:rPr lang="zh-TW" altLang="en-US" smtClean="0"/>
               <a:pPr/>
-              <a:t>2026/6/11</a:t>
+              <a:t>2026/6/13</a:t>
             </a:fld>
             <a:endParaRPr lang="zh-TW" altLang="en-US"/>
           </a:p>
@@ -4569,7 +4569,7 @@
             <a:fld id="{DF19C816-D38B-498E-804E-00D02760FC7A}" type="datetime1">
               <a:rPr lang="zh-TW" altLang="en-US" smtClean="0"/>
               <a:pPr/>
-              <a:t>2026/6/11</a:t>
+              <a:t>2026/6/13</a:t>
             </a:fld>
             <a:endParaRPr lang="zh-TW" altLang="en-US"/>
           </a:p>
@@ -4959,7 +4959,7 @@
             <a:fld id="{BFF116A9-7278-4674-BCA0-66C5F066EB15}" type="datetime1">
               <a:rPr lang="zh-TW" altLang="en-US" smtClean="0"/>
               <a:pPr/>
-              <a:t>2026/6/11</a:t>
+              <a:t>2026/6/13</a:t>
             </a:fld>
             <a:endParaRPr lang="zh-TW" altLang="en-US"/>
           </a:p>
@@ -5489,7 +5489,7 @@
             <a:fld id="{97D0AF00-ACBD-4185-8358-D82955DAF0D3}" type="datetime1">
               <a:rPr lang="zh-TW" altLang="en-US" smtClean="0"/>
               <a:pPr/>
-              <a:t>2026/6/11</a:t>
+              <a:t>2026/6/13</a:t>
             </a:fld>
             <a:endParaRPr lang="zh-TW" altLang="en-US"/>
           </a:p>
@@ -5618,7 +5618,7 @@
             <a:fld id="{E16BAABA-C288-41C0-9D8E-87773CE9488B}" type="datetime1">
               <a:rPr lang="zh-TW" altLang="en-US" smtClean="0"/>
               <a:pPr/>
-              <a:t>2026/6/11</a:t>
+              <a:t>2026/6/13</a:t>
             </a:fld>
             <a:endParaRPr lang="zh-TW" altLang="en-US"/>
           </a:p>
@@ -6158,7 +6158,7 @@
             <a:fld id="{E6F79EFE-5102-4BAD-A377-702F02C2814E}" type="datetime1">
               <a:rPr lang="zh-TW" altLang="en-US" smtClean="0"/>
               <a:pPr/>
-              <a:t>2026/6/11</a:t>
+              <a:t>2026/6/13</a:t>
             </a:fld>
             <a:endParaRPr lang="zh-TW" altLang="en-US"/>
           </a:p>
@@ -6450,7 +6450,7 @@
             <a:fld id="{240F5BD8-68CC-49A6-B769-229D3FACB86C}" type="datetime1">
               <a:rPr lang="zh-TW" altLang="en-US" smtClean="0"/>
               <a:pPr/>
-              <a:t>2026/6/11</a:t>
+              <a:t>2026/6/13</a:t>
             </a:fld>
             <a:endParaRPr lang="zh-TW" altLang="en-US"/>
           </a:p>
@@ -7106,7 +7106,7 @@
             <a:fld id="{C95C3C99-9A5D-4B12-8519-BF3493FEA3BD}" type="datetime1">
               <a:rPr lang="zh-TW" altLang="en-US" smtClean="0"/>
               <a:pPr/>
-              <a:t>2026/6/11</a:t>
+              <a:t>2026/6/13</a:t>
             </a:fld>
             <a:endParaRPr lang="zh-TW" altLang="en-US"/>
           </a:p>
@@ -7544,7 +7544,7 @@
             <a:fld id="{C0C1B973-9C4C-43B9-BBC9-7D038B5E66BB}" type="datetime1">
               <a:rPr lang="zh-TW" altLang="en-US" smtClean="0"/>
               <a:pPr/>
-              <a:t>2026/6/11</a:t>
+              <a:t>2026/6/13</a:t>
             </a:fld>
             <a:endParaRPr lang="zh-TW" altLang="en-US"/>
           </a:p>
@@ -7859,7 +7859,7 @@
             <a:fld id="{E3A2E384-56FB-46D9-B267-C20E836A8212}" type="datetime1">
               <a:rPr lang="zh-TW" altLang="en-US" smtClean="0"/>
               <a:pPr/>
-              <a:t>2026/6/11</a:t>
+              <a:t>2026/6/13</a:t>
             </a:fld>
             <a:endParaRPr lang="zh-TW" altLang="en-US"/>
           </a:p>
@@ -8589,7 +8589,7 @@
             <a:fld id="{33A25C06-3635-48B4-9326-561BB1229EEB}" type="datetime1">
               <a:rPr lang="zh-TW" altLang="en-US" smtClean="0"/>
               <a:pPr/>
-              <a:t>2026/6/11</a:t>
+              <a:t>2026/6/13</a:t>
             </a:fld>
             <a:endParaRPr lang="zh-TW" altLang="en-US"/>
           </a:p>
@@ -9255,7 +9255,7 @@
             <a:fld id="{BA9F43BE-0941-4E88-B57D-D38DECBCB997}" type="datetime1">
               <a:rPr lang="zh-TW" altLang="en-US" smtClean="0"/>
               <a:pPr/>
-              <a:t>2026/6/11</a:t>
+              <a:t>2026/6/13</a:t>
             </a:fld>
             <a:endParaRPr lang="zh-TW" altLang="en-US"/>
           </a:p>
@@ -9532,7 +9532,7 @@
             <a:fld id="{73E7C058-3467-44CD-AC53-31F205DF3CA0}" type="datetime1">
               <a:rPr lang="zh-TW" altLang="en-US" smtClean="0"/>
               <a:pPr/>
-              <a:t>2026/6/11</a:t>
+              <a:t>2026/6/13</a:t>
             </a:fld>
             <a:endParaRPr lang="zh-TW" altLang="en-US"/>
           </a:p>
@@ -16002,7 +16002,26 @@
                 <a:latin typeface="Courier New" panose="02070309020205020404" pitchFamily="49" charset="0"/>
                 <a:ea typeface="標楷體" panose="03000509000000000000" pitchFamily="65" charset="-120"/>
               </a:rPr>
-              <a:t>', widget=</a:t>
+              <a:t>', </a:t>
+            </a:r>
+            <a:r>
+              <a:rPr lang="en-US" altLang="zh-TW" sz="1800" kern="100" dirty="0">
+                <a:solidFill>
+                  <a:srgbClr val="FF0000"/>
+                </a:solidFill>
+                <a:effectLst/>
+                <a:latin typeface="Courier New" panose="02070309020205020404" pitchFamily="49" charset="0"/>
+                <a:ea typeface="標楷體" panose="03000509000000000000" pitchFamily="65" charset="-120"/>
+              </a:rPr>
+              <a:t>widget</a:t>
+            </a:r>
+            <a:r>
+              <a:rPr lang="en-US" altLang="zh-TW" sz="1800" kern="100" dirty="0">
+                <a:effectLst/>
+                <a:latin typeface="Courier New" panose="02070309020205020404" pitchFamily="49" charset="0"/>
+                <a:ea typeface="標楷體" panose="03000509000000000000" pitchFamily="65" charset="-120"/>
+              </a:rPr>
+              <a:t>=</a:t>
             </a:r>
             <a:r>
               <a:rPr lang="en-US" altLang="zh-TW" sz="1800" kern="100" dirty="0" err="1">
@@ -16930,6 +16949,30 @@
               </a:rPr>
               <a:t>veiws.login</a:t>
             </a:r>
+            <a:r>
+              <a:rPr lang="en-US" altLang="zh-TW" dirty="0">
+                <a:solidFill>
+                  <a:srgbClr val="FF0000"/>
+                </a:solidFill>
+              </a:rPr>
+              <a:t>(</a:t>
+            </a:r>
+            <a:r>
+              <a:rPr lang="zh-TW" altLang="en-US" dirty="0">
+                <a:solidFill>
+                  <a:srgbClr val="FF0000"/>
+                </a:solidFill>
+              </a:rPr>
+              <a:t>二</a:t>
+            </a:r>
+            <a:r>
+              <a:rPr lang="en-US" altLang="zh-TW" dirty="0">
+                <a:solidFill>
+                  <a:srgbClr val="FF0000"/>
+                </a:solidFill>
+              </a:rPr>
+              <a:t>)</a:t>
+            </a:r>
             <a:br>
               <a:rPr lang="en-US" altLang="zh-TW" dirty="0">
                 <a:solidFill>
@@ -16959,7 +17002,23 @@
                   <a:srgbClr val="FF0000"/>
                 </a:solidFill>
               </a:rPr>
-              <a:t>欄位名稱</a:t>
+              <a:t>欄位名稱，</a:t>
+            </a:r>
+            <a:r>
+              <a:rPr lang="en-US" altLang="zh-TW" dirty="0">
+                <a:solidFill>
+                  <a:srgbClr val="FF0000"/>
+                </a:solidFill>
+              </a:rPr>
+              <a:t>strip()</a:t>
+            </a:r>
+            <a:r>
+              <a:rPr lang="zh-TW" altLang="en-US" dirty="0">
+                <a:solidFill>
+                  <a:srgbClr val="FF0000"/>
+                </a:solidFill>
+              </a:rPr>
+              <a:t>是去掉空白字元</a:t>
             </a:r>
             <a:endParaRPr lang="zh-TW" altLang="en-US" dirty="0"/>
           </a:p>
@@ -17001,8 +17060,8 @@
         </p:nvSpPr>
         <p:spPr>
           <a:xfrm>
-            <a:off x="301752" y="1527048"/>
-            <a:ext cx="8662736" cy="5070304"/>
+            <a:off x="35496" y="1527048"/>
+            <a:ext cx="9073008" cy="5070304"/>
           </a:xfrm>
         </p:spPr>
         <p:txBody>
@@ -17305,9 +17364,45 @@
                 <a:latin typeface="Courier New" panose="02070309020205020404" pitchFamily="49" charset="0"/>
                 <a:ea typeface="標楷體" panose="03000509000000000000" pitchFamily="65" charset="-120"/>
               </a:rPr>
-              <a:t>['username'].strip()</a:t>
+              <a:t>[‘username’].</a:t>
+            </a:r>
+            <a:r>
+              <a:rPr lang="en-US" altLang="zh-TW" sz="1800" kern="100" dirty="0">
+                <a:solidFill>
+                  <a:srgbClr val="FF0000"/>
+                </a:solidFill>
+                <a:effectLst/>
+                <a:latin typeface="Courier New" panose="02070309020205020404" pitchFamily="49" charset="0"/>
+                <a:ea typeface="標楷體" panose="03000509000000000000" pitchFamily="65" charset="-120"/>
+              </a:rPr>
+              <a:t>strip()(</a:t>
+            </a:r>
+            <a:r>
+              <a:rPr lang="zh-TW" altLang="en-US" sz="1800" kern="100" dirty="0">
+                <a:solidFill>
+                  <a:srgbClr val="FF0000"/>
+                </a:solidFill>
+                <a:effectLst/>
+                <a:latin typeface="Courier New" panose="02070309020205020404" pitchFamily="49" charset="0"/>
+                <a:ea typeface="標楷體" panose="03000509000000000000" pitchFamily="65" charset="-120"/>
+              </a:rPr>
+              <a:t>去掉空格</a:t>
+            </a:r>
+            <a:r>
+              <a:rPr lang="en-US" altLang="zh-TW" sz="1800" kern="100" dirty="0">
+                <a:solidFill>
+                  <a:srgbClr val="FF0000"/>
+                </a:solidFill>
+                <a:effectLst/>
+                <a:latin typeface="Courier New" panose="02070309020205020404" pitchFamily="49" charset="0"/>
+                <a:ea typeface="標楷體" panose="03000509000000000000" pitchFamily="65" charset="-120"/>
+              </a:rPr>
+              <a:t>)</a:t>
             </a:r>
             <a:endParaRPr lang="zh-TW" altLang="zh-TW" sz="1800" kern="100" dirty="0">
+              <a:solidFill>
+                <a:srgbClr val="FF0000"/>
+              </a:solidFill>
               <a:effectLst/>
               <a:latin typeface="Courier New" panose="02070309020205020404" pitchFamily="49" charset="0"/>
               <a:ea typeface="標楷體" panose="03000509000000000000" pitchFamily="65" charset="-120"/>
@@ -18140,14 +18235,30 @@
             </a:r>
             <a:r>
               <a:rPr lang="zh-TW" altLang="en-US" dirty="0"/>
-              <a:t>說明可跨網頁取得</a:t>
-            </a:r>
-            <a:r>
-              <a:rPr lang="en-US" altLang="zh-TW" dirty="0"/>
+              <a:t>說明</a:t>
+            </a:r>
+            <a:r>
+              <a:rPr lang="zh-TW" altLang="en-US" dirty="0">
+                <a:solidFill>
+                  <a:srgbClr val="FF0000"/>
+                </a:solidFill>
+              </a:rPr>
+              <a:t>可跨網頁取得</a:t>
+            </a:r>
+            <a:r>
+              <a:rPr lang="en-US" altLang="zh-TW" dirty="0">
+                <a:solidFill>
+                  <a:srgbClr val="FF0000"/>
+                </a:solidFill>
+              </a:rPr>
               <a:t>session</a:t>
             </a:r>
             <a:r>
-              <a:rPr lang="zh-TW" altLang="en-US" dirty="0"/>
+              <a:rPr lang="zh-TW" altLang="en-US" dirty="0">
+                <a:solidFill>
+                  <a:srgbClr val="FF0000"/>
+                </a:solidFill>
+              </a:rPr>
               <a:t>資料</a:t>
             </a:r>
             <a:r>
@@ -18529,6 +18640,18 @@
             <a:r>
               <a:rPr lang="zh-TW" altLang="zh-TW" dirty="0"/>
               <a:t>建立使用者資料表</a:t>
+            </a:r>
+            <a:r>
+              <a:rPr lang="en-US" altLang="zh-TW" dirty="0"/>
+              <a:t>(</a:t>
+            </a:r>
+            <a:r>
+              <a:rPr lang="zh-TW" altLang="en-US" dirty="0"/>
+              <a:t>三</a:t>
+            </a:r>
+            <a:r>
+              <a:rPr lang="en-US" altLang="zh-TW" dirty="0"/>
+              <a:t>)</a:t>
             </a:r>
             <a:endParaRPr lang="zh-TW" altLang="en-US" dirty="0"/>
           </a:p>
@@ -20329,6 +20452,18 @@
               <a:rPr lang="zh-TW" altLang="zh-TW" sz="3600" dirty="0"/>
               <a:t>如何處理登出</a:t>
             </a:r>
+            <a:r>
+              <a:rPr lang="en-US" altLang="zh-TW" sz="3600" dirty="0"/>
+              <a:t>(</a:t>
+            </a:r>
+            <a:r>
+              <a:rPr lang="zh-TW" altLang="en-US" sz="3600" dirty="0"/>
+              <a:t>四</a:t>
+            </a:r>
+            <a:r>
+              <a:rPr lang="en-US" altLang="zh-TW" sz="3600" dirty="0"/>
+              <a:t>)</a:t>
+            </a:r>
             <a:endParaRPr lang="zh-TW" altLang="en-US" dirty="0"/>
           </a:p>
         </p:txBody>
@@ -20790,6 +20925,18 @@
             <a:r>
               <a:rPr lang="zh-TW" altLang="zh-TW" dirty="0"/>
               <a:t>建立使用者資料表</a:t>
+            </a:r>
+            <a:r>
+              <a:rPr lang="en-US" altLang="zh-TW" dirty="0"/>
+              <a:t>(</a:t>
+            </a:r>
+            <a:r>
+              <a:rPr lang="zh-TW" altLang="en-US" dirty="0"/>
+              <a:t>五</a:t>
+            </a:r>
+            <a:r>
+              <a:rPr lang="en-US" altLang="zh-TW" dirty="0"/>
+              <a:t>)</a:t>
             </a:r>
             <a:endParaRPr lang="zh-TW" altLang="en-US" dirty="0"/>
           </a:p>
@@ -23103,7 +23250,15 @@
             </a:r>
             <a:r>
               <a:rPr lang="en-US" altLang="zh-TW" dirty="0"/>
-              <a:t>Messages Framework</a:t>
+              <a:t>Messages Framework(</a:t>
+            </a:r>
+            <a:r>
+              <a:rPr lang="zh-TW" altLang="en-US" dirty="0"/>
+              <a:t>六</a:t>
+            </a:r>
+            <a:r>
+              <a:rPr lang="en-US" altLang="zh-TW" dirty="0"/>
+              <a:t>)</a:t>
             </a:r>
             <a:endParaRPr lang="zh-TW" altLang="en-US" dirty="0"/>
           </a:p>
@@ -25642,16 +25797,32 @@
           <a:p>
             <a:pPr lvl="1"/>
             <a:r>
+              <a:rPr lang="en-US" altLang="zh-TW" dirty="0">
+                <a:solidFill>
+                  <a:srgbClr val="FF0000"/>
+                </a:solidFill>
+              </a:rPr>
+              <a:t>from </a:t>
+            </a:r>
+            <a:r>
+              <a:rPr lang="en-US" altLang="zh-TW" dirty="0" err="1">
+                <a:solidFill>
+                  <a:srgbClr val="FF0000"/>
+                </a:solidFill>
+              </a:rPr>
+              <a:t>django.contrib.auth.models</a:t>
+            </a:r>
+            <a:r>
+              <a:rPr lang="en-US" altLang="zh-TW" dirty="0">
+                <a:solidFill>
+                  <a:srgbClr val="FF0000"/>
+                </a:solidFill>
+              </a:rPr>
+              <a:t> </a:t>
+            </a:r>
+            <a:r>
               <a:rPr lang="en-US" altLang="zh-TW" dirty="0"/>
-              <a:t>from </a:t>
-            </a:r>
-            <a:r>
-              <a:rPr lang="en-US" altLang="zh-TW" dirty="0" err="1"/>
-              <a:t>django.contrib.auth.models</a:t>
-            </a:r>
-            <a:r>
-              <a:rPr lang="en-US" altLang="zh-TW" dirty="0"/>
-              <a:t> import User</a:t>
+              <a:t>import User</a:t>
             </a:r>
             <a:endParaRPr lang="zh-TW" altLang="zh-TW" dirty="0"/>
           </a:p>
@@ -26507,7 +26678,9 @@
         </p:nvSpPr>
         <p:spPr/>
         <p:txBody>
-          <a:bodyPr/>
+          <a:bodyPr>
+            <a:normAutofit fontScale="90000"/>
+          </a:bodyPr>
           <a:lstStyle/>
           <a:p>
             <a:r>
@@ -26526,7 +26699,69 @@
               <a:rPr lang="zh-TW" altLang="zh-TW" dirty="0"/>
               <a:t>的使用者驗證系統</a:t>
             </a:r>
-            <a:endParaRPr lang="zh-TW" altLang="en-US" dirty="0"/>
+            <a:r>
+              <a:rPr lang="en-US" altLang="zh-TW" dirty="0">
+                <a:solidFill>
+                  <a:srgbClr val="FF0000"/>
+                </a:solidFill>
+              </a:rPr>
+              <a:t>(</a:t>
+            </a:r>
+            <a:r>
+              <a:rPr lang="zh-TW" altLang="en-US" dirty="0">
+                <a:solidFill>
+                  <a:srgbClr val="FF0000"/>
+                </a:solidFill>
+              </a:rPr>
+              <a:t>七</a:t>
+            </a:r>
+            <a:r>
+              <a:rPr lang="en-US" altLang="zh-TW" dirty="0">
+                <a:solidFill>
+                  <a:srgbClr val="FF0000"/>
+                </a:solidFill>
+              </a:rPr>
+              <a:t>)</a:t>
+            </a:r>
+            <a:br>
+              <a:rPr lang="en-US" altLang="zh-TW" dirty="0">
+                <a:solidFill>
+                  <a:srgbClr val="FF0000"/>
+                </a:solidFill>
+              </a:rPr>
+            </a:br>
+            <a:r>
+              <a:rPr lang="en-US" altLang="zh-TW" dirty="0">
+                <a:solidFill>
+                  <a:srgbClr val="FF0000"/>
+                </a:solidFill>
+              </a:rPr>
+              <a:t>copy </a:t>
+            </a:r>
+            <a:r>
+              <a:rPr lang="zh-TW" altLang="en-US" dirty="0">
+                <a:solidFill>
+                  <a:srgbClr val="FF0000"/>
+                </a:solidFill>
+              </a:rPr>
+              <a:t>二、六、的</a:t>
+            </a:r>
+            <a:r>
+              <a:rPr lang="en-US" altLang="zh-TW" dirty="0">
+                <a:solidFill>
+                  <a:srgbClr val="FF0000"/>
+                </a:solidFill>
+              </a:rPr>
+              <a:t>login</a:t>
+            </a:r>
+            <a:r>
+              <a:rPr lang="zh-TW" altLang="en-US" dirty="0">
+                <a:solidFill>
+                  <a:srgbClr val="FF0000"/>
+                </a:solidFill>
+              </a:rPr>
+              <a:t>來改</a:t>
+            </a:r>
           </a:p>
         </p:txBody>
       </p:sp>
@@ -26947,6 +27182,30 @@
               <a:rPr lang="zh-TW" altLang="zh-TW" dirty="0"/>
               <a:t>的使用者驗證系統</a:t>
             </a:r>
+            <a:r>
+              <a:rPr lang="en-US" altLang="zh-TW" dirty="0">
+                <a:solidFill>
+                  <a:srgbClr val="FF0000"/>
+                </a:solidFill>
+              </a:rPr>
+              <a:t>(</a:t>
+            </a:r>
+            <a:r>
+              <a:rPr lang="zh-TW" altLang="en-US" dirty="0">
+                <a:solidFill>
+                  <a:srgbClr val="FF0000"/>
+                </a:solidFill>
+              </a:rPr>
+              <a:t>七</a:t>
+            </a:r>
+            <a:r>
+              <a:rPr lang="en-US" altLang="zh-TW" dirty="0">
+                <a:solidFill>
+                  <a:srgbClr val="FF0000"/>
+                </a:solidFill>
+              </a:rPr>
+              <a:t>)</a:t>
+            </a:r>
             <a:endParaRPr lang="zh-TW" altLang="en-US" dirty="0"/>
           </a:p>
         </p:txBody>
@@ -28137,7 +28396,35 @@
               <a:rPr lang="zh-TW" altLang="zh-TW" dirty="0"/>
               <a:t>的使用者驗證系統</a:t>
             </a:r>
-            <a:endParaRPr lang="zh-TW" altLang="en-US" dirty="0"/>
+            <a:r>
+              <a:rPr lang="en-US" altLang="zh-TW" dirty="0">
+                <a:solidFill>
+                  <a:srgbClr val="FF0000"/>
+                </a:solidFill>
+              </a:rPr>
+              <a:t>(</a:t>
+            </a:r>
+            <a:r>
+              <a:rPr lang="zh-TW" altLang="en-US" dirty="0">
+                <a:solidFill>
+                  <a:srgbClr val="FF0000"/>
+                </a:solidFill>
+              </a:rPr>
+              <a:t>八</a:t>
+            </a:r>
+            <a:r>
+              <a:rPr lang="en-US" altLang="zh-TW" dirty="0">
+                <a:solidFill>
+                  <a:srgbClr val="FF0000"/>
+                </a:solidFill>
+              </a:rPr>
+              <a:t>)</a:t>
+            </a:r>
+            <a:endParaRPr lang="zh-TW" altLang="en-US" dirty="0">
+              <a:solidFill>
+                <a:srgbClr val="FF0000"/>
+              </a:solidFill>
+            </a:endParaRPr>
           </a:p>
         </p:txBody>
       </p:sp>
@@ -28418,18 +28705,46 @@
           <a:lstStyle/>
           <a:p>
             <a:r>
-              <a:rPr lang="zh-TW" altLang="zh-TW"/>
+              <a:rPr lang="zh-TW" altLang="zh-TW" dirty="0"/>
               <a:t>使用</a:t>
             </a:r>
             <a:r>
-              <a:rPr lang="en-US" altLang="zh-TW"/>
+              <a:rPr lang="en-US" altLang="zh-TW" dirty="0"/>
               <a:t>Django</a:t>
             </a:r>
             <a:r>
-              <a:rPr lang="zh-TW" altLang="zh-TW"/>
+              <a:rPr lang="zh-TW" altLang="zh-TW" dirty="0"/>
               <a:t>的使用者驗證系統</a:t>
             </a:r>
-            <a:endParaRPr lang="zh-TW" altLang="en-US"/>
+            <a:r>
+              <a:rPr lang="en-US" altLang="zh-TW" dirty="0">
+                <a:solidFill>
+                  <a:srgbClr val="FF0000"/>
+                </a:solidFill>
+              </a:rPr>
+              <a:t>(</a:t>
+            </a:r>
+            <a:r>
+              <a:rPr lang="zh-TW" altLang="en-US" dirty="0">
+                <a:solidFill>
+                  <a:srgbClr val="FF0000"/>
+                </a:solidFill>
+              </a:rPr>
+              <a:t>九</a:t>
+            </a:r>
+            <a:r>
+              <a:rPr lang="en-US" altLang="zh-TW" dirty="0">
+                <a:solidFill>
+                  <a:srgbClr val="FF0000"/>
+                </a:solidFill>
+              </a:rPr>
+              <a:t>)</a:t>
+            </a:r>
+            <a:endParaRPr lang="zh-TW" altLang="en-US" dirty="0">
+              <a:solidFill>
+                <a:srgbClr val="FF0000"/>
+              </a:solidFill>
+            </a:endParaRPr>
           </a:p>
         </p:txBody>
       </p:sp>
@@ -29285,7 +29600,35 @@
               <a:rPr lang="zh-TW" altLang="zh-TW" dirty="0"/>
               <a:t>的使用者驗證系統</a:t>
             </a:r>
-            <a:endParaRPr lang="zh-TW" altLang="en-US" dirty="0"/>
+            <a:r>
+              <a:rPr lang="en-US" altLang="zh-TW" dirty="0">
+                <a:solidFill>
+                  <a:srgbClr val="FF0000"/>
+                </a:solidFill>
+              </a:rPr>
+              <a:t>(</a:t>
+            </a:r>
+            <a:r>
+              <a:rPr lang="zh-TW" altLang="en-US" dirty="0">
+                <a:solidFill>
+                  <a:srgbClr val="FF0000"/>
+                </a:solidFill>
+              </a:rPr>
+              <a:t>十</a:t>
+            </a:r>
+            <a:r>
+              <a:rPr lang="en-US" altLang="zh-TW" dirty="0">
+                <a:solidFill>
+                  <a:srgbClr val="FF0000"/>
+                </a:solidFill>
+              </a:rPr>
+              <a:t>)</a:t>
+            </a:r>
+            <a:endParaRPr lang="zh-TW" altLang="en-US" dirty="0">
+              <a:solidFill>
+                <a:srgbClr val="FF0000"/>
+              </a:solidFill>
+            </a:endParaRPr>
           </a:p>
         </p:txBody>
       </p:sp>
@@ -29361,18 +29704,71 @@
               <a:t>    </a:t>
             </a:r>
             <a:r>
+              <a:rPr lang="en-US" altLang="zh-TW" sz="3200" dirty="0" err="1">
+                <a:solidFill>
+                  <a:srgbClr val="FF0000"/>
+                </a:solidFill>
+                <a:latin typeface="Courier New" panose="02070309020205020404" pitchFamily="49" charset="0"/>
+                <a:cs typeface="Courier New" panose="02070309020205020404" pitchFamily="49" charset="0"/>
+              </a:rPr>
+              <a:t>auth.logout</a:t>
+            </a:r>
+            <a:r>
+              <a:rPr lang="en-US" altLang="zh-TW" sz="3200" dirty="0">
+                <a:solidFill>
+                  <a:srgbClr val="FF0000"/>
+                </a:solidFill>
+                <a:latin typeface="Courier New" panose="02070309020205020404" pitchFamily="49" charset="0"/>
+                <a:cs typeface="Courier New" panose="02070309020205020404" pitchFamily="49" charset="0"/>
+              </a:rPr>
+              <a:t>(request)</a:t>
+            </a:r>
+            <a:endParaRPr lang="zh-TW" altLang="zh-TW" sz="3200" dirty="0">
+              <a:solidFill>
+                <a:srgbClr val="FF0000"/>
+              </a:solidFill>
+              <a:latin typeface="Courier New" panose="02070309020205020404" pitchFamily="49" charset="0"/>
+              <a:cs typeface="Courier New" panose="02070309020205020404" pitchFamily="49" charset="0"/>
+            </a:endParaRPr>
+          </a:p>
+          <a:p>
+            <a:pPr marL="274320" lvl="1" indent="0">
+              <a:buNone/>
+            </a:pPr>
+            <a:r>
+              <a:rPr lang="en-US" altLang="zh-TW" dirty="0">
+                <a:latin typeface="Courier New" panose="02070309020205020404" pitchFamily="49" charset="0"/>
+                <a:cs typeface="Courier New" panose="02070309020205020404" pitchFamily="49" charset="0"/>
+              </a:rPr>
+              <a:t>    </a:t>
+            </a:r>
+            <a:r>
               <a:rPr lang="en-US" altLang="zh-TW" dirty="0" err="1">
                 <a:latin typeface="Courier New" panose="02070309020205020404" pitchFamily="49" charset="0"/>
                 <a:cs typeface="Courier New" panose="02070309020205020404" pitchFamily="49" charset="0"/>
               </a:rPr>
-              <a:t>auth.logout</a:t>
+              <a:t>messages.add_message</a:t>
             </a:r>
             <a:r>
               <a:rPr lang="en-US" altLang="zh-TW" dirty="0">
                 <a:latin typeface="Courier New" panose="02070309020205020404" pitchFamily="49" charset="0"/>
                 <a:cs typeface="Courier New" panose="02070309020205020404" pitchFamily="49" charset="0"/>
               </a:rPr>
-              <a:t>(request)</a:t>
+              <a:t>(request, messages.INFO, "</a:t>
+            </a:r>
+            <a:r>
+              <a:rPr lang="zh-TW" altLang="zh-TW" dirty="0">
+                <a:latin typeface="Courier New" panose="02070309020205020404" pitchFamily="49" charset="0"/>
+                <a:cs typeface="Courier New" panose="02070309020205020404" pitchFamily="49" charset="0"/>
+              </a:rPr>
+              <a:t>成功登出了</a:t>
+            </a:r>
+            <a:r>
+              <a:rPr lang="en-US" altLang="zh-TW" dirty="0">
+                <a:latin typeface="Courier New" panose="02070309020205020404" pitchFamily="49" charset="0"/>
+                <a:cs typeface="Courier New" panose="02070309020205020404" pitchFamily="49" charset="0"/>
+              </a:rPr>
+              <a:t>")</a:t>
             </a:r>
             <a:endParaRPr lang="zh-TW" altLang="zh-TW" dirty="0">
               <a:latin typeface="Courier New" panose="02070309020205020404" pitchFamily="49" charset="0"/>
@@ -29388,53 +29784,22 @@
                 <a:latin typeface="Courier New" panose="02070309020205020404" pitchFamily="49" charset="0"/>
                 <a:cs typeface="Courier New" panose="02070309020205020404" pitchFamily="49" charset="0"/>
               </a:rPr>
-              <a:t>    </a:t>
-            </a:r>
-            <a:r>
-              <a:rPr lang="en-US" altLang="zh-TW" dirty="0" err="1">
+              <a:t>    return redirect</a:t>
+            </a:r>
+            <a:r>
+              <a:rPr lang="en-US" altLang="zh-TW" dirty="0">
+                <a:solidFill>
+                  <a:srgbClr val="FF0000"/>
+                </a:solidFill>
                 <a:latin typeface="Courier New" panose="02070309020205020404" pitchFamily="49" charset="0"/>
                 <a:cs typeface="Courier New" panose="02070309020205020404" pitchFamily="49" charset="0"/>
               </a:rPr>
-              <a:t>messages.add_message</a:t>
-            </a:r>
-            <a:r>
-              <a:rPr lang="en-US" altLang="zh-TW" dirty="0">
-                <a:latin typeface="Courier New" panose="02070309020205020404" pitchFamily="49" charset="0"/>
-                <a:cs typeface="Courier New" panose="02070309020205020404" pitchFamily="49" charset="0"/>
-              </a:rPr>
-              <a:t>(request, messages.INFO, "</a:t>
-            </a:r>
-            <a:r>
-              <a:rPr lang="zh-TW" altLang="zh-TW" dirty="0">
-                <a:latin typeface="Courier New" panose="02070309020205020404" pitchFamily="49" charset="0"/>
-                <a:cs typeface="Courier New" panose="02070309020205020404" pitchFamily="49" charset="0"/>
-              </a:rPr>
-              <a:t>成功登出了</a:t>
-            </a:r>
-            <a:r>
-              <a:rPr lang="en-US" altLang="zh-TW" dirty="0">
-                <a:latin typeface="Courier New" panose="02070309020205020404" pitchFamily="49" charset="0"/>
-                <a:cs typeface="Courier New" panose="02070309020205020404" pitchFamily="49" charset="0"/>
-              </a:rPr>
-              <a:t>")</a:t>
+              <a:t>('/')</a:t>
             </a:r>
             <a:endParaRPr lang="zh-TW" altLang="zh-TW" dirty="0">
-              <a:latin typeface="Courier New" panose="02070309020205020404" pitchFamily="49" charset="0"/>
-              <a:cs typeface="Courier New" panose="02070309020205020404" pitchFamily="49" charset="0"/>
-            </a:endParaRPr>
-          </a:p>
-          <a:p>
-            <a:pPr marL="274320" lvl="1" indent="0">
-              <a:buNone/>
-            </a:pPr>
-            <a:r>
-              <a:rPr lang="en-US" altLang="zh-TW" dirty="0">
-                <a:latin typeface="Courier New" panose="02070309020205020404" pitchFamily="49" charset="0"/>
-                <a:cs typeface="Courier New" panose="02070309020205020404" pitchFamily="49" charset="0"/>
-              </a:rPr>
-              <a:t>    return redirect('/')</a:t>
-            </a:r>
-            <a:endParaRPr lang="zh-TW" altLang="zh-TW" dirty="0">
+              <a:solidFill>
+                <a:srgbClr val="FF0000"/>
+              </a:solidFill>
               <a:latin typeface="Courier New" panose="02070309020205020404" pitchFamily="49" charset="0"/>
               <a:cs typeface="Courier New" panose="02070309020205020404" pitchFamily="49" charset="0"/>
             </a:endParaRPr>
@@ -30381,7 +30746,35 @@
               <a:rPr lang="zh-TW" altLang="zh-TW" dirty="0"/>
               <a:t>的欄位</a:t>
             </a:r>
-            <a:endParaRPr lang="zh-TW" altLang="en-US" dirty="0"/>
+            <a:r>
+              <a:rPr lang="en-US" altLang="zh-TW" dirty="0">
+                <a:solidFill>
+                  <a:srgbClr val="FF0000"/>
+                </a:solidFill>
+              </a:rPr>
+              <a:t>(</a:t>
+            </a:r>
+            <a:r>
+              <a:rPr lang="zh-TW" altLang="en-US" dirty="0">
+                <a:solidFill>
+                  <a:srgbClr val="FF0000"/>
+                </a:solidFill>
+              </a:rPr>
+              <a:t>十一</a:t>
+            </a:r>
+            <a:r>
+              <a:rPr lang="en-US" altLang="zh-TW" dirty="0">
+                <a:solidFill>
+                  <a:srgbClr val="FF0000"/>
+                </a:solidFill>
+              </a:rPr>
+              <a:t>)</a:t>
+            </a:r>
+            <a:endParaRPr lang="zh-TW" altLang="en-US" dirty="0">
+              <a:solidFill>
+                <a:srgbClr val="FF0000"/>
+              </a:solidFill>
+            </a:endParaRPr>
           </a:p>
         </p:txBody>
       </p:sp>
@@ -30549,7 +30942,26 @@
                 <a:latin typeface="Courier New" panose="02070309020205020404" pitchFamily="49" charset="0"/>
                 <a:ea typeface="標楷體" panose="03000509000000000000" pitchFamily="65" charset="-120"/>
               </a:rPr>
-              <a:t>class Profile(</a:t>
+              <a:t>class </a:t>
+            </a:r>
+            <a:r>
+              <a:rPr lang="en-US" altLang="zh-TW" sz="1800" kern="100" dirty="0">
+                <a:solidFill>
+                  <a:srgbClr val="FF0000"/>
+                </a:solidFill>
+                <a:effectLst/>
+                <a:latin typeface="Courier New" panose="02070309020205020404" pitchFamily="49" charset="0"/>
+                <a:ea typeface="標楷體" panose="03000509000000000000" pitchFamily="65" charset="-120"/>
+              </a:rPr>
+              <a:t>Profile</a:t>
+            </a:r>
+            <a:r>
+              <a:rPr lang="en-US" altLang="zh-TW" sz="1800" kern="100" dirty="0">
+                <a:effectLst/>
+                <a:latin typeface="Courier New" panose="02070309020205020404" pitchFamily="49" charset="0"/>
+                <a:ea typeface="標楷體" panose="03000509000000000000" pitchFamily="65" charset="-120"/>
+              </a:rPr>
+              <a:t>(</a:t>
             </a:r>
             <a:r>
               <a:rPr lang="en-US" altLang="zh-TW" sz="1800" kern="100" dirty="0" err="1">
@@ -33337,6 +33749,13 @@
               <a:rPr lang="zh-TW" altLang="zh-TW" dirty="0"/>
               <a:t>，就算是完成了網站的複製工作了。</a:t>
             </a:r>
+            <a:endParaRPr lang="en-US" altLang="zh-TW" dirty="0"/>
+          </a:p>
+          <a:p>
+            <a:r>
+              <a:rPr lang="en-US" altLang="zh-TW" dirty="0"/>
+              <a:t>Forms -&gt; chart</a:t>
+            </a:r>
             <a:endParaRPr lang="zh-TW" altLang="en-US" dirty="0"/>
           </a:p>
         </p:txBody>
@@ -40432,9 +40851,18 @@
         </p:nvSpPr>
         <p:spPr/>
         <p:txBody>
-          <a:bodyPr/>
+          <a:bodyPr>
+            <a:normAutofit fontScale="90000"/>
+          </a:bodyPr>
           <a:lstStyle/>
           <a:p>
+            <a:r>
+              <a:rPr lang="zh-TW" altLang="en-US" dirty="0"/>
+              <a:t>直接匯入資料檔</a:t>
+            </a:r>
+            <a:br>
+              <a:rPr lang="en-US" altLang="zh-TW" dirty="0"/>
+            </a:br>
             <a:r>
               <a:rPr lang="zh-TW" altLang="en-US" dirty="0"/>
               <a:t>建立匯入</a:t>
@@ -40453,7 +40881,23 @@
                   <a:srgbClr val="FF0000"/>
                 </a:solidFill>
               </a:rPr>
-              <a:t>importdata.py</a:t>
+              <a:t>importdata.py(</a:t>
+            </a:r>
+            <a:r>
+              <a:rPr lang="zh-TW" altLang="en-US" dirty="0">
+                <a:solidFill>
+                  <a:srgbClr val="FF0000"/>
+                </a:solidFill>
+              </a:rPr>
+              <a:t>略</a:t>
+            </a:r>
+            <a:r>
+              <a:rPr lang="en-US" altLang="zh-TW" dirty="0">
+                <a:solidFill>
+                  <a:srgbClr val="FF0000"/>
+                </a:solidFill>
+              </a:rPr>
+              <a:t>)</a:t>
             </a:r>
             <a:endParaRPr lang="zh-TW" altLang="en-US" dirty="0">
               <a:solidFill>
@@ -41265,7 +41709,11 @@
               <a:rPr lang="en-US" altLang="zh-TW" dirty="0"/>
             </a:br>
             <a:r>
-              <a:rPr lang="zh-TW" altLang="en-US" dirty="0"/>
+              <a:rPr lang="zh-TW" altLang="en-US" dirty="0">
+                <a:solidFill>
+                  <a:srgbClr val="FF0000"/>
+                </a:solidFill>
+              </a:rPr>
               <a:t>要執行第二次才能確定是否支援</a:t>
             </a:r>
           </a:p>
@@ -41404,10 +41852,22 @@
             </a:r>
             <a:r>
               <a:rPr lang="en-US" altLang="zh-TW" dirty="0" err="1"/>
-              <a:t>request.session.test_cookie_worked</a:t>
-            </a:r>
-            <a:r>
-              <a:rPr lang="en-US" altLang="zh-TW" dirty="0"/>
+              <a:t>request.session.</a:t>
+            </a:r>
+            <a:r>
+              <a:rPr lang="en-US" altLang="zh-TW" dirty="0" err="1">
+                <a:solidFill>
+                  <a:srgbClr val="FF0000"/>
+                </a:solidFill>
+              </a:rPr>
+              <a:t>test_cookie_worked</a:t>
+            </a:r>
+            <a:r>
+              <a:rPr lang="en-US" altLang="zh-TW" dirty="0">
+                <a:solidFill>
+                  <a:srgbClr val="FF0000"/>
+                </a:solidFill>
+              </a:rPr>
               <a:t>():</a:t>
             </a:r>
           </a:p>
@@ -41450,10 +41910,22 @@
             </a:r>
             <a:r>
               <a:rPr lang="en-US" altLang="zh-TW" dirty="0" err="1"/>
-              <a:t>request.session.set_test_cookie</a:t>
-            </a:r>
-            <a:r>
-              <a:rPr lang="en-US" altLang="zh-TW" dirty="0"/>
+              <a:t>request.session.</a:t>
+            </a:r>
+            <a:r>
+              <a:rPr lang="en-US" altLang="zh-TW" dirty="0" err="1">
+                <a:solidFill>
+                  <a:srgbClr val="FF0000"/>
+                </a:solidFill>
+              </a:rPr>
+              <a:t>set_test_cookie</a:t>
+            </a:r>
+            <a:r>
+              <a:rPr lang="en-US" altLang="zh-TW" dirty="0">
+                <a:solidFill>
+                  <a:srgbClr val="FF0000"/>
+                </a:solidFill>
+              </a:rPr>
               <a:t>()</a:t>
             </a:r>
           </a:p>
@@ -41518,8 +41990,8 @@
           <a:lstStyle/>
           <a:p>
             <a:r>
-              <a:rPr lang="zh-TW" altLang="en-US"/>
-              <a:t>環境設定</a:t>
+              <a:rPr lang="zh-TW" altLang="en-US" dirty="0"/>
+              <a:t>相關檔案串聯設定</a:t>
             </a:r>
           </a:p>
         </p:txBody>
@@ -41570,10 +42042,15 @@
             <p:ph sz="quarter" idx="1"/>
           </p:nvPr>
         </p:nvSpPr>
-        <p:spPr/>
+        <p:spPr>
+          <a:xfrm>
+            <a:off x="301752" y="1196752"/>
+            <a:ext cx="8503920" cy="5544616"/>
+          </a:xfrm>
+        </p:spPr>
         <p:txBody>
           <a:bodyPr>
-            <a:normAutofit fontScale="92500" lnSpcReduction="10000"/>
+            <a:normAutofit/>
           </a:bodyPr>
           <a:lstStyle/>
           <a:p>
@@ -41606,7 +42083,26 @@
                 <a:latin typeface="Courier New" panose="02070309020205020404" pitchFamily="49" charset="0"/>
                 <a:ea typeface="標楷體" panose="03000509000000000000" pitchFamily="65" charset="-120"/>
               </a:rPr>
-              <a:t>path('votes/', </a:t>
+              <a:t>path(</a:t>
+            </a:r>
+            <a:r>
+              <a:rPr lang="en-US" altLang="zh-TW" sz="1800" kern="100" dirty="0">
+                <a:solidFill>
+                  <a:srgbClr val="FF0000"/>
+                </a:solidFill>
+                <a:effectLst/>
+                <a:latin typeface="Courier New" panose="02070309020205020404" pitchFamily="49" charset="0"/>
+                <a:ea typeface="標楷體" panose="03000509000000000000" pitchFamily="65" charset="-120"/>
+              </a:rPr>
+              <a:t>'votes/</a:t>
+            </a:r>
+            <a:r>
+              <a:rPr lang="en-US" altLang="zh-TW" sz="1800" kern="100" dirty="0">
+                <a:effectLst/>
+                <a:latin typeface="Courier New" panose="02070309020205020404" pitchFamily="49" charset="0"/>
+                <a:ea typeface="標楷體" panose="03000509000000000000" pitchFamily="65" charset="-120"/>
+              </a:rPr>
+              <a:t>', </a:t>
             </a:r>
             <a:r>
               <a:rPr lang="en-US" altLang="zh-TW" sz="1800" kern="100" dirty="0" err="1">
@@ -41660,10 +42156,18 @@
                 <a:latin typeface="Courier New" panose="02070309020205020404" pitchFamily="49" charset="0"/>
                 <a:ea typeface="標楷體" panose="03000509000000000000" pitchFamily="65" charset="-120"/>
               </a:rPr>
-              <a:t>      &lt;a class="nav-link" </a:t>
-            </a:r>
-            <a:r>
-              <a:rPr lang="en-US" altLang="zh-TW" sz="1600" kern="100" dirty="0" err="1">
+              <a:t>      </a:t>
+            </a:r>
+            <a:r>
+              <a:rPr lang="en-US" altLang="zh-TW" kern="100" dirty="0">
+                <a:effectLst/>
+                <a:latin typeface="Courier New" panose="02070309020205020404" pitchFamily="49" charset="0"/>
+                <a:ea typeface="標楷體" panose="03000509000000000000" pitchFamily="65" charset="-120"/>
+              </a:rPr>
+              <a:t>&lt;a class="nav-link" </a:t>
+            </a:r>
+            <a:r>
+              <a:rPr lang="en-US" altLang="zh-TW" kern="100" dirty="0" err="1">
                 <a:effectLst/>
                 <a:latin typeface="Courier New" panose="02070309020205020404" pitchFamily="49" charset="0"/>
                 <a:ea typeface="標楷體" panose="03000509000000000000" pitchFamily="65" charset="-120"/>
@@ -41671,7 +42175,7 @@
               <a:t>href</a:t>
             </a:r>
             <a:r>
-              <a:rPr lang="en-US" altLang="zh-TW" sz="1600" b="1" kern="100" dirty="0">
+              <a:rPr lang="en-US" altLang="zh-TW" b="1" kern="100" dirty="0">
                 <a:solidFill>
                   <a:srgbClr val="FF0000"/>
                 </a:solidFill>
@@ -41682,7 +42186,7 @@
               <a:t>="/votes/"&gt;</a:t>
             </a:r>
             <a:r>
-              <a:rPr lang="zh-TW" altLang="zh-TW" sz="1600" kern="100" dirty="0">
+              <a:rPr lang="zh-TW" altLang="zh-TW" kern="100" dirty="0">
                 <a:effectLst/>
                 <a:latin typeface="Courier New" panose="02070309020205020404" pitchFamily="49" charset="0"/>
                 <a:ea typeface="標楷體" panose="03000509000000000000" pitchFamily="65" charset="-120"/>
@@ -41690,7 +42194,7 @@
               <a:t>得票資訊</a:t>
             </a:r>
             <a:r>
-              <a:rPr lang="en-US" altLang="zh-TW" sz="1600" kern="100" dirty="0">
+              <a:rPr lang="en-US" altLang="zh-TW" kern="100" dirty="0">
                 <a:effectLst/>
                 <a:latin typeface="Courier New" panose="02070309020205020404" pitchFamily="49" charset="0"/>
                 <a:ea typeface="標楷體" panose="03000509000000000000" pitchFamily="65" charset="-120"/>
@@ -41704,30 +42208,76 @@
             </a:pPr>
             <a:r>
               <a:rPr lang="en-US" altLang="zh-TW" dirty="0"/>
-              <a:t>	&lt;a class="nav-link" </a:t>
-            </a:r>
-            <a:r>
-              <a:rPr lang="en-US" altLang="zh-TW" dirty="0" err="1"/>
+              <a:t>	</a:t>
+            </a:r>
+            <a:r>
+              <a:rPr lang="en-US" altLang="zh-TW" sz="1900" dirty="0">
+                <a:solidFill>
+                  <a:schemeClr val="bg1">
+                    <a:lumMod val="75000"/>
+                  </a:schemeClr>
+                </a:solidFill>
+              </a:rPr>
+              <a:t>&lt;a class="nav-link" </a:t>
+            </a:r>
+            <a:r>
+              <a:rPr lang="en-US" altLang="zh-TW" sz="1900" dirty="0" err="1">
+                <a:solidFill>
+                  <a:schemeClr val="bg1">
+                    <a:lumMod val="75000"/>
+                  </a:schemeClr>
+                </a:solidFill>
+              </a:rPr>
               <a:t>href</a:t>
             </a:r>
             <a:r>
-              <a:rPr lang="en-US" altLang="zh-TW" dirty="0"/>
+              <a:rPr lang="en-US" altLang="zh-TW" sz="1900" dirty="0">
+                <a:solidFill>
+                  <a:schemeClr val="bg1">
+                    <a:lumMod val="75000"/>
+                  </a:schemeClr>
+                </a:solidFill>
+              </a:rPr>
               <a:t>={% </a:t>
             </a:r>
             <a:r>
-              <a:rPr lang="en-US" altLang="zh-TW" dirty="0" err="1"/>
+              <a:rPr lang="en-US" altLang="zh-TW" sz="1900" dirty="0" err="1">
+                <a:solidFill>
+                  <a:schemeClr val="bg1">
+                    <a:lumMod val="75000"/>
+                  </a:schemeClr>
+                </a:solidFill>
+              </a:rPr>
               <a:t>url</a:t>
             </a:r>
             <a:r>
-              <a:rPr lang="en-US" altLang="zh-TW" dirty="0"/>
+              <a:rPr lang="en-US" altLang="zh-TW" sz="1900" dirty="0">
+                <a:solidFill>
+                  <a:schemeClr val="bg1">
+                    <a:lumMod val="75000"/>
+                  </a:schemeClr>
+                </a:solidFill>
+              </a:rPr>
               <a:t> 'votes' %}&gt;</a:t>
             </a:r>
             <a:r>
-              <a:rPr lang="zh-TW" altLang="en-US" dirty="0"/>
+              <a:rPr lang="zh-TW" altLang="en-US" sz="1900" dirty="0">
+                <a:solidFill>
+                  <a:schemeClr val="bg1">
+                    <a:lumMod val="75000"/>
+                  </a:schemeClr>
+                </a:solidFill>
+              </a:rPr>
               <a:t>投票</a:t>
             </a:r>
             <a:r>
-              <a:rPr lang="en-US" altLang="zh-TW" dirty="0"/>
+              <a:rPr lang="en-US" altLang="zh-TW" sz="1900" dirty="0">
+                <a:solidFill>
+                  <a:schemeClr val="bg1">
+                    <a:lumMod val="75000"/>
+                  </a:schemeClr>
+                </a:solidFill>
+              </a:rPr>
               <a:t>&lt;/a&gt;</a:t>
             </a:r>
           </a:p>
@@ -41785,7 +42335,26 @@
                 <a:latin typeface="Courier New" panose="02070309020205020404" pitchFamily="49" charset="0"/>
                 <a:ea typeface="標楷體" panose="03000509000000000000" pitchFamily="65" charset="-120"/>
               </a:rPr>
-              <a:t>def votes(request):</a:t>
+              <a:t>def </a:t>
+            </a:r>
+            <a:r>
+              <a:rPr lang="en-US" altLang="zh-TW" sz="1600" kern="100" dirty="0">
+                <a:solidFill>
+                  <a:srgbClr val="FF0000"/>
+                </a:solidFill>
+                <a:effectLst/>
+                <a:latin typeface="Courier New" panose="02070309020205020404" pitchFamily="49" charset="0"/>
+                <a:ea typeface="標楷體" panose="03000509000000000000" pitchFamily="65" charset="-120"/>
+              </a:rPr>
+              <a:t>votes</a:t>
+            </a:r>
+            <a:r>
+              <a:rPr lang="en-US" altLang="zh-TW" sz="1600" kern="100" dirty="0">
+                <a:effectLst/>
+                <a:latin typeface="Courier New" panose="02070309020205020404" pitchFamily="49" charset="0"/>
+                <a:ea typeface="標楷體" panose="03000509000000000000" pitchFamily="65" charset="-120"/>
+              </a:rPr>
+              <a:t>(request):</a:t>
             </a:r>
             <a:endParaRPr lang="zh-TW" altLang="zh-TW" sz="1600" kern="100" dirty="0">
               <a:effectLst/>
@@ -41803,10 +42372,24 @@
                 <a:latin typeface="Courier New" panose="02070309020205020404" pitchFamily="49" charset="0"/>
                 <a:ea typeface="標楷體" panose="03000509000000000000" pitchFamily="65" charset="-120"/>
               </a:rPr>
-              <a:t>    data = </a:t>
+              <a:t>    </a:t>
+            </a:r>
+            <a:r>
+              <a:rPr lang="en-US" altLang="zh-TW" sz="1600" kern="100" dirty="0">
+                <a:solidFill>
+                  <a:srgbClr val="FF0000"/>
+                </a:solidFill>
+                <a:effectLst/>
+                <a:latin typeface="Courier New" panose="02070309020205020404" pitchFamily="49" charset="0"/>
+                <a:ea typeface="標楷體" panose="03000509000000000000" pitchFamily="65" charset="-120"/>
+              </a:rPr>
+              <a:t>data = </a:t>
             </a:r>
             <a:r>
               <a:rPr lang="en-US" altLang="zh-TW" sz="1600" kern="100" dirty="0" err="1">
+                <a:solidFill>
+                  <a:srgbClr val="FF0000"/>
+                </a:solidFill>
                 <a:effectLst/>
                 <a:latin typeface="Courier New" panose="02070309020205020404" pitchFamily="49" charset="0"/>
                 <a:ea typeface="標楷體" panose="03000509000000000000" pitchFamily="65" charset="-120"/>
@@ -41815,6 +42398,9 @@
             </a:r>
             <a:r>
               <a:rPr lang="en-US" altLang="zh-TW" sz="1600" kern="100" dirty="0">
+                <a:solidFill>
+                  <a:srgbClr val="FF0000"/>
+                </a:solidFill>
                 <a:effectLst/>
                 <a:latin typeface="Courier New" panose="02070309020205020404" pitchFamily="49" charset="0"/>
                 <a:ea typeface="標楷體" panose="03000509000000000000" pitchFamily="65" charset="-120"/>
@@ -41822,6 +42408,9 @@
               <a:t>()</a:t>
             </a:r>
             <a:endParaRPr lang="zh-TW" altLang="zh-TW" sz="1600" kern="100" dirty="0">
+              <a:solidFill>
+                <a:srgbClr val="FF0000"/>
+              </a:solidFill>
               <a:effectLst/>
               <a:latin typeface="Courier New" panose="02070309020205020404" pitchFamily="49" charset="0"/>
               <a:ea typeface="標楷體" panose="03000509000000000000" pitchFamily="65" charset="-120"/>
@@ -43179,18 +43768,34 @@
               <a:t>官網由上到下順序</a:t>
             </a:r>
             <a:r>
-              <a:rPr lang="en-US" altLang="zh-TW" dirty="0"/>
+              <a:rPr lang="en-US" altLang="zh-TW" dirty="0">
+                <a:solidFill>
+                  <a:srgbClr val="FF0000"/>
+                </a:solidFill>
+              </a:rPr>
               <a:t>(</a:t>
             </a:r>
             <a:r>
-              <a:rPr lang="zh-TW" altLang="en-US" dirty="0"/>
+              <a:rPr lang="zh-TW" altLang="en-US" dirty="0">
+                <a:solidFill>
+                  <a:srgbClr val="FF0000"/>
+                </a:solidFill>
+              </a:rPr>
               <a:t>略直接用下兩頁方法</a:t>
             </a:r>
             <a:r>
-              <a:rPr lang="en-US" altLang="zh-TW" dirty="0"/>
+              <a:rPr lang="en-US" altLang="zh-TW" dirty="0">
+                <a:solidFill>
+                  <a:srgbClr val="FF0000"/>
+                </a:solidFill>
+              </a:rPr>
               <a:t>)</a:t>
             </a:r>
-            <a:endParaRPr lang="zh-TW" altLang="en-US" dirty="0"/>
+            <a:endParaRPr lang="zh-TW" altLang="en-US" dirty="0">
+              <a:solidFill>
+                <a:srgbClr val="FF0000"/>
+              </a:solidFill>
+            </a:endParaRPr>
           </a:p>
         </p:txBody>
       </p:sp>
@@ -43649,19 +44254,35 @@
               <a:t>連結</a:t>
             </a:r>
             <a:r>
-              <a:rPr lang="en-US" altLang="zh-TW" dirty="0"/>
+              <a:rPr lang="en-US" altLang="zh-TW" dirty="0">
+                <a:solidFill>
+                  <a:srgbClr val="FF0000"/>
+                </a:solidFill>
+              </a:rPr>
               <a:t>(</a:t>
             </a:r>
             <a:r>
-              <a:rPr lang="zh-TW" altLang="en-US" dirty="0"/>
+              <a:rPr lang="zh-TW" altLang="en-US" dirty="0">
+                <a:solidFill>
+                  <a:srgbClr val="FF0000"/>
+                </a:solidFill>
+              </a:rPr>
               <a:t>略直接用下一頁方法</a:t>
             </a:r>
             <a:r>
-              <a:rPr lang="en-US" altLang="zh-TW" dirty="0"/>
+              <a:rPr lang="en-US" altLang="zh-TW" dirty="0">
+                <a:solidFill>
+                  <a:srgbClr val="FF0000"/>
+                </a:solidFill>
+              </a:rPr>
               <a:t>)</a:t>
             </a:r>
             <a:r>
-              <a:rPr lang="zh-TW" altLang="en-US" dirty="0"/>
+              <a:rPr lang="zh-TW" altLang="en-US" dirty="0">
+                <a:solidFill>
+                  <a:srgbClr val="FF0000"/>
+                </a:solidFill>
+              </a:rPr>
               <a:t> </a:t>
             </a:r>
             <a:br>
@@ -45075,6 +45696,75 @@
           </a:p>
         </p:txBody>
       </p:sp>
+      <p:pic>
+        <p:nvPicPr>
+          <p:cNvPr id="8" name="圖片 7">
+            <a:extLst>
+              <a:ext uri="{FF2B5EF4-FFF2-40B4-BE49-F238E27FC236}">
+                <a16:creationId xmlns:a16="http://schemas.microsoft.com/office/drawing/2014/main" id="{CC3876A9-F6C4-483C-EF8E-96EF1C41F92C}"/>
+              </a:ext>
+            </a:extLst>
+          </p:cNvPr>
+          <p:cNvPicPr>
+            <a:picLocks noChangeAspect="1"/>
+          </p:cNvPicPr>
+          <p:nvPr/>
+        </p:nvPicPr>
+        <p:blipFill>
+          <a:blip r:embed="rId6"/>
+          <a:stretch>
+            <a:fillRect/>
+          </a:stretch>
+        </p:blipFill>
+        <p:spPr>
+          <a:xfrm>
+            <a:off x="6804248" y="2614361"/>
+            <a:ext cx="2535965" cy="2048759"/>
+          </a:xfrm>
+          <a:prstGeom prst="rect">
+            <a:avLst/>
+          </a:prstGeom>
+        </p:spPr>
+      </p:pic>
+      <p:cxnSp>
+        <p:nvCxnSpPr>
+          <p:cNvPr id="12" name="直線單箭頭接點 11">
+            <a:extLst>
+              <a:ext uri="{FF2B5EF4-FFF2-40B4-BE49-F238E27FC236}">
+                <a16:creationId xmlns:a16="http://schemas.microsoft.com/office/drawing/2014/main" id="{140437D3-42F0-DE68-43A6-47C903321F54}"/>
+              </a:ext>
+            </a:extLst>
+          </p:cNvPr>
+          <p:cNvCxnSpPr/>
+          <p:nvPr/>
+        </p:nvCxnSpPr>
+        <p:spPr>
+          <a:xfrm flipH="1">
+            <a:off x="8172400" y="3429000"/>
+            <a:ext cx="628462" cy="504056"/>
+          </a:xfrm>
+          <a:prstGeom prst="straightConnector1">
+            <a:avLst/>
+          </a:prstGeom>
+          <a:ln w="38100">
+            <a:tailEnd type="triangle"/>
+          </a:ln>
+        </p:spPr>
+        <p:style>
+          <a:lnRef idx="1">
+            <a:schemeClr val="accent1"/>
+          </a:lnRef>
+          <a:fillRef idx="0">
+            <a:schemeClr val="accent1"/>
+          </a:fillRef>
+          <a:effectRef idx="0">
+            <a:schemeClr val="accent1"/>
+          </a:effectRef>
+          <a:fontRef idx="minor">
+            <a:schemeClr val="tx1"/>
+          </a:fontRef>
+        </p:style>
+      </p:cxnSp>
     </p:spTree>
     <p:extLst>
       <p:ext uri="{BB962C8B-B14F-4D97-AF65-F5344CB8AC3E}">
@@ -45247,17 +45937,46 @@
           <a:lstStyle/>
           <a:p>
             <a:r>
-              <a:rPr lang="zh-TW" altLang="en-US"/>
+              <a:rPr lang="zh-TW" altLang="en-US" dirty="0"/>
               <a:t>修改真實的選票資料到</a:t>
             </a:r>
             <a:r>
-              <a:rPr lang="en-US" altLang="zh-TW"/>
+              <a:rPr lang="en-US" altLang="zh-TW" dirty="0"/>
               <a:t>votes.html</a:t>
             </a:r>
             <a:r>
-              <a:rPr lang="zh-TW" altLang="en-US"/>
+              <a:rPr lang="zh-TW" altLang="en-US" dirty="0"/>
               <a:t>中</a:t>
             </a:r>
+            <a:r>
+              <a:rPr lang="en-US" altLang="zh-TW" dirty="0">
+                <a:solidFill>
+                  <a:srgbClr val="FF0000"/>
+                </a:solidFill>
+              </a:rPr>
+              <a:t>(</a:t>
+            </a:r>
+            <a:r>
+              <a:rPr lang="zh-TW" altLang="en-US" dirty="0">
+                <a:solidFill>
+                  <a:srgbClr val="FF0000"/>
+                </a:solidFill>
+              </a:rPr>
+              <a:t>二一</a:t>
+            </a:r>
+            <a:r>
+              <a:rPr lang="en-US" altLang="zh-TW" dirty="0">
+                <a:solidFill>
+                  <a:srgbClr val="FF0000"/>
+                </a:solidFill>
+              </a:rPr>
+              <a:t>)</a:t>
+            </a:r>
+            <a:endParaRPr lang="zh-TW" altLang="en-US" dirty="0">
+              <a:solidFill>
+                <a:srgbClr val="FF0000"/>
+              </a:solidFill>
+            </a:endParaRPr>
           </a:p>
         </p:txBody>
       </p:sp>
@@ -46219,9 +46938,38 @@
           <a:lstStyle/>
           <a:p>
             <a:r>
-              <a:rPr lang="zh-TW" altLang="en-US"/>
+              <a:rPr lang="zh-TW" altLang="en-US" dirty="0"/>
               <a:t>改為橫條圖設定</a:t>
             </a:r>
+            <a:r>
+              <a:rPr lang="en-US" altLang="zh-TW" dirty="0">
+                <a:solidFill>
+                  <a:srgbClr val="FF0000"/>
+                </a:solidFill>
+              </a:rPr>
+              <a:t>(</a:t>
+            </a:r>
+            <a:r>
+              <a:rPr lang="zh-TW" altLang="en-US" dirty="0">
+                <a:solidFill>
+                  <a:srgbClr val="FF0000"/>
+                </a:solidFill>
+              </a:rPr>
+              <a:t>二二</a:t>
+            </a:r>
+            <a:r>
+              <a:rPr lang="en-US" altLang="zh-TW" dirty="0">
+                <a:solidFill>
+                  <a:srgbClr val="FF0000"/>
+                </a:solidFill>
+              </a:rPr>
+              <a:t>)</a:t>
+            </a:r>
+            <a:endParaRPr lang="zh-TW" altLang="en-US" dirty="0">
+              <a:solidFill>
+                <a:srgbClr val="FF0000"/>
+              </a:solidFill>
+            </a:endParaRPr>
           </a:p>
         </p:txBody>
       </p:sp>
@@ -46533,9 +47281,32 @@
             </a:r>
             <a:r>
               <a:rPr lang="zh-TW" altLang="en-US" dirty="0"/>
-              <a:t>的呈現比例</a:t>
-            </a:r>
-            <a:endParaRPr lang="en-US" altLang="zh-TW" dirty="0"/>
+              <a:t>的呈現比例 </a:t>
+            </a:r>
+            <a:r>
+              <a:rPr lang="en-US" altLang="zh-TW" dirty="0">
+                <a:solidFill>
+                  <a:srgbClr val="FF0000"/>
+                </a:solidFill>
+              </a:rPr>
+              <a:t>(</a:t>
+            </a:r>
+            <a:r>
+              <a:rPr lang="zh-TW" altLang="en-US" dirty="0">
+                <a:solidFill>
+                  <a:srgbClr val="FF0000"/>
+                </a:solidFill>
+              </a:rPr>
+              <a:t>二三</a:t>
+            </a:r>
+            <a:r>
+              <a:rPr lang="en-US" altLang="zh-TW" dirty="0">
+                <a:solidFill>
+                  <a:srgbClr val="FF0000"/>
+                </a:solidFill>
+              </a:rPr>
+              <a:t>)</a:t>
+            </a:r>
           </a:p>
           <a:p>
             <a:pPr marL="0" indent="0">
